--- a/teaching-pack/12-M08-spurious-correlation/M08-student.pptx
+++ b/teaching-pack/12-M08-spurious-correlation/M08-student.pptx
@@ -10033,7 +10033,7 @@
                 </a:solidFill>
                 <a:latin typeface="Arial"/>
               </a:rPr>
-              <a:t>Midspan strain rises with date. R² = 0.89.</a:t>
+              <a:t>Midspan strain rises with date. R² = 0.87.</a:t>
             </a:r>
           </a:p>
           <a:p>

--- a/teaching-pack/12-M08-spurious-correlation/M08-student.pptx
+++ b/teaching-pack/12-M08-spurious-correlation/M08-student.pptx
@@ -518,19 +518,13 @@
           <a:lstStyle/>
           <a:p>
             <a:r>
-              <a:t>OLI STORY/SAY STATUS: PENDING CLOUD PASS — DO NOT TREAT THIS HOOK AS CANON SAY.</a:t>
+              <a:t>OLI CANON SAY — Cloud hard-review PASS.</a:t>
             </a:r>
           </a:p>
           <a:p/>
           <a:p>
             <a:r>
-              <a:t>PASTE APPROVED SAY HERE, preserving the instructional action below.</a:t>
-            </a:r>
-          </a:p>
-          <a:p/>
-          <a:p>
-            <a:r>
-              <a:t>TITLE HOOK — Introduce M08 and Unit 2's next designed error. Preserve the distinction between a strong relationship and damage evidence.</a:t>
+              <a:t>TITLE — M08: “It is spring.” Students investigate whether a strong fitted relationship supports FOREMAN’s damage claim.</a:t>
             </a:r>
           </a:p>
         </p:txBody>
@@ -600,19 +594,13 @@
           <a:lstStyle/>
           <a:p>
             <a:r>
-              <a:t>OLI STORY/SAY STATUS: PENDING CLOUD PASS — DO NOT TREAT THIS HOOK AS CANON SAY.</a:t>
+              <a:t>OLI CANON SAY — Cloud hard-review PASS.</a:t>
             </a:r>
           </a:p>
           <a:p/>
           <a:p>
             <a:r>
-              <a:t>PASTE APPROVED SAY HERE, preserving the instructional action below.</a:t>
-            </a:r>
-          </a:p>
-          <a:p/>
-          <a:p>
-            <a:r>
-              <a:t>TEACH HOOK — Define spurious correlation as a misleading inference, not fabricated data.</a:t>
+              <a:t>TEACH — Explain spurious correlation as an association that misleads about the damage claim.</a:t>
             </a:r>
           </a:p>
         </p:txBody>
@@ -682,19 +670,13 @@
           <a:lstStyle/>
           <a:p>
             <a:r>
-              <a:t>OLI STORY/SAY STATUS: PENDING CLOUD PASS — DO NOT TREAT THIS HOOK AS CANON SAY.</a:t>
+              <a:t>OLI CANON SAY — Cloud hard-review PASS.</a:t>
             </a:r>
           </a:p>
           <a:p/>
           <a:p>
             <a:r>
-              <a:t>PASTE APPROVED SAY HERE, preserving the instructional action below.</a:t>
-            </a:r>
-          </a:p>
-          <a:p/>
-          <a:p>
-            <a:r>
-              <a:t>LAB TRANSITION HOOK — Open the investigation without naming the temperature mechanism.</a:t>
+              <a:t>LAB TRANSITION — Students receive feed.csv and weather_station.csv. Do not solve the trend for them.</a:t>
             </a:r>
           </a:p>
         </p:txBody>
@@ -764,19 +746,13 @@
           <a:lstStyle/>
           <a:p>
             <a:r>
-              <a:t>OLI STORY/SAY STATUS: PENDING CLOUD PASS — DO NOT TREAT THIS HOOK AS CANON SAY.</a:t>
+              <a:t>OLI CANON SAY — Cloud hard-review PASS.</a:t>
             </a:r>
           </a:p>
           <a:p/>
           <a:p>
             <a:r>
-              <a:t>PASTE APPROVED SAY HERE, preserving the instructional action below.</a:t>
-            </a:r>
-          </a:p>
-          <a:p/>
-          <a:p>
-            <a:r>
-              <a:t>LAB A HOOK — Students reproduce FOREMAN's date model and write a noncausal description.</a:t>
+              <a:t>LAB — Student task: plot strain versus date using feed.csv and fit the line in a spreadsheet.</a:t>
             </a:r>
           </a:p>
         </p:txBody>
@@ -846,19 +822,13 @@
           <a:lstStyle/>
           <a:p>
             <a:r>
-              <a:t>OLI STORY/SAY STATUS: PENDING CLOUD PASS — DO NOT TREAT THIS HOOK AS CANON SAY.</a:t>
+              <a:t>OLI CANON SAY — Cloud hard-review PASS.</a:t>
             </a:r>
           </a:p>
           <a:p/>
           <a:p>
             <a:r>
-              <a:t>PASTE APPROVED SAY HERE, preserving the instructional action below.</a:t>
-            </a:r>
-          </a:p>
-          <a:p/>
-          <a:p>
-            <a:r>
-              <a:t>LAB B HOOK — Release weather_station.csv. Require timestamp and unit checks before modeling.</a:t>
+              <a:t>LAB — Student task: plot strain versus air temperature using weather_station.csv and fit the line. Students perform the join and comparison.</a:t>
             </a:r>
           </a:p>
         </p:txBody>
@@ -928,19 +898,13 @@
           <a:lstStyle/>
           <a:p>
             <a:r>
-              <a:t>OLI STORY/SAY STATUS: PENDING CLOUD PASS — DO NOT TREAT THIS HOOK AS CANON SAY.</a:t>
+              <a:t>OLI CANON SAY — Cloud hard-review PASS.</a:t>
             </a:r>
           </a:p>
           <a:p/>
           <a:p>
             <a:r>
-              <a:t>PASTE APPROVED SAY HERE, preserving the instructional action below.</a:t>
-            </a:r>
-          </a:p>
-          <a:p/>
-          <a:p>
-            <a:r>
-              <a:t>LAB C HOOK — After students see the temperature relationship, elicit the thermal expansion mechanism.</a:t>
+              <a:t>LAB — Student task: identify the mechanism driving the strain, not just the pattern. Students find that temperature drives the calendar trend and strain; steel expands when it warms.</a:t>
             </a:r>
           </a:p>
         </p:txBody>
@@ -1010,19 +974,13 @@
           <a:lstStyle/>
           <a:p>
             <a:r>
-              <a:t>OLI STORY/SAY STATUS: PENDING CLOUD PASS — DO NOT TREAT THIS HOOK AS CANON SAY.</a:t>
+              <a:t>OLI CANON SAY — Cloud hard-review PASS.</a:t>
             </a:r>
           </a:p>
           <a:p/>
           <a:p>
             <a:r>
-              <a:t>PASTE APPROVED SAY HERE, preserving the instructional action below.</a:t>
-            </a:r>
-          </a:p>
-          <a:p/>
-          <a:p>
-            <a:r>
-              <a:t>LAB D HOOK — Set up residual correction as HW4's method; preserve the distinction between 'not evidence of damage' and 'proof of no damage.'</a:t>
+              <a:t>LAB — Students set up the temperature correction and prepare the two-line reply. Preserve the boundary: this trend does not support progressive damage; the correction does not prove no damage.</a:t>
             </a:r>
           </a:p>
         </p:txBody>
@@ -1092,19 +1050,13 @@
           <a:lstStyle/>
           <a:p>
             <a:r>
-              <a:t>OLI STORY/SAY STATUS: PENDING CLOUD PASS — DO NOT TREAT THIS HOOK AS CANON SAY.</a:t>
+              <a:t>OLI CANON SAY — Cloud hard-review PASS.</a:t>
             </a:r>
           </a:p>
           <a:p/>
           <a:p>
             <a:r>
-              <a:t>PASTE APPROVED SAY HERE, preserving the instructional action below.</a:t>
-            </a:r>
-          </a:p>
-          <a:p/>
-          <a:p>
-            <a:r>
-              <a:t>NOTE HOOK — Students commit claim/check/result before the reveal.</a:t>
+              <a:t>NOTE — Students write Note version 2: claim, check, result. Continue the form handed off at M07.</a:t>
             </a:r>
           </a:p>
         </p:txBody>
@@ -1174,19 +1126,13 @@
           <a:lstStyle/>
           <a:p>
             <a:r>
-              <a:t>OLI STORY/SAY STATUS: PENDING CLOUD PASS — DO NOT TREAT THIS HOOK AS CANON SAY.</a:t>
+              <a:t>OLI CANON SAY — Cloud hard-review PASS.</a:t>
             </a:r>
           </a:p>
           <a:p/>
           <a:p>
             <a:r>
-              <a:t>PASTE APPROVED SAY HERE, preserving the instructional action below.</a:t>
-            </a:r>
-          </a:p>
-          <a:p/>
-          <a:p>
-            <a:r>
-              <a:t>CLOSE HOOK — Assign HW4 here. Insert approved story close when available; do not preview later Unit 2 revelations.</a:t>
+              <a:t>CLOSE — Assign HW4: temperature-corrected strain trend plus a two-line reply to FOREMAN’s claim. Diane still wants the impressive R-squared in the county-facing report; students leave with the corrected note. Lightly hold rising measurement pressure without naming later concepts.</a:t>
             </a:r>
           </a:p>
         </p:txBody>
@@ -1256,19 +1202,13 @@
           <a:lstStyle/>
           <a:p>
             <a:r>
-              <a:t>OLI STORY/SAY STATUS: PENDING CLOUD PASS — DO NOT TREAT THIS HOOK AS CANON SAY.</a:t>
+              <a:t>OLI CANON SAY — Cloud hard-review PASS.</a:t>
             </a:r>
           </a:p>
           <a:p/>
           <a:p>
             <a:r>
-              <a:t>PASTE APPROVED SAY HERE, preserving the instructional action below.</a:t>
-            </a:r>
-          </a:p>
-          <a:p/>
-          <a:p>
-            <a:r>
-              <a:t>INBOX HOOK — Deliver the approved FOREMAN/Diane/Wes story beat here. Preserve: date-model R², deterioration overclaim, Diane in believer mode. Do not add later bearing-wear or exam details.</a:t>
+              <a:t>INBOX — FOREMAN reports that midspan strain has risen steadily since February 1, R-squared 0.87 against date, indicating progressive structural deterioration. Diane Halvorsen, PE: “0.87 sounds high. Put it in the report.” Wes Tanaka, EIT is drafting and distracted under schedule pressure; he is not the discoverer.</a:t>
             </a:r>
           </a:p>
         </p:txBody>
@@ -1338,19 +1278,13 @@
           <a:lstStyle/>
           <a:p>
             <a:r>
-              <a:t>OLI STORY/SAY STATUS: PENDING CLOUD PASS — DO NOT TREAT THIS HOOK AS CANON SAY.</a:t>
+              <a:t>OLI CANON SAY — Cloud hard-review PASS.</a:t>
             </a:r>
           </a:p>
           <a:p/>
           <a:p>
             <a:r>
-              <a:t>PASTE APPROVED SAY HERE, preserving the instructional action below.</a:t>
-            </a:r>
-          </a:p>
-          <a:p/>
-          <a:p>
-            <a:r>
-              <a:t>HUNT HOOK — Frame the four student actions without disclosing temperature as the answer before the hunt begins.</a:t>
+              <a:t>HUNT — Students are the hunters. They reproduce the date plot, compare it with the weather record, identify the mechanism driving strain, and prepare HW4. Do not disclose the result before they work.</a:t>
             </a:r>
           </a:p>
         </p:txBody>
@@ -1420,19 +1354,13 @@
           <a:lstStyle/>
           <a:p>
             <a:r>
-              <a:t>OLI STORY/SAY STATUS: PENDING CLOUD PASS — DO NOT TREAT THIS HOOK AS CANON SAY.</a:t>
+              <a:t>OLI CANON SAY — Cloud hard-review PASS.</a:t>
             </a:r>
           </a:p>
           <a:p/>
           <a:p>
             <a:r>
-              <a:t>PASTE APPROVED SAY HERE, preserving the instructional action below.</a:t>
-            </a:r>
-          </a:p>
-          <a:p/>
-          <a:p>
-            <a:r>
-              <a:t>TEACH TRANSITION HOOK — Move from story evidence into scatter plots.</a:t>
+              <a:t>TEACH TRANSITION — Concepts: scatter plot, correlation coefficient, linear regression, R-squared, correlation versus causation, and spurious correlation.</a:t>
             </a:r>
           </a:p>
         </p:txBody>
@@ -1502,19 +1430,13 @@
           <a:lstStyle/>
           <a:p>
             <a:r>
-              <a:t>OLI STORY/SAY STATUS: PENDING CLOUD PASS — DO NOT TREAT THIS HOOK AS CANON SAY.</a:t>
+              <a:t>OLI CANON SAY — Cloud hard-review PASS.</a:t>
             </a:r>
           </a:p>
           <a:p/>
           <a:p>
             <a:r>
-              <a:t>PASTE APPROVED SAY HERE, preserving the instructional action below.</a:t>
-            </a:r>
-          </a:p>
-          <a:p/>
-          <a:p>
-            <a:r>
-              <a:t>TEACH HOOK — Ask students what they inspect before calculating a coefficient.</a:t>
+              <a:t>TEACH — Explain how a scatter plot displays the strain-versus-date pairs before a line is fitted.</a:t>
             </a:r>
           </a:p>
         </p:txBody>
@@ -1584,19 +1506,13 @@
           <a:lstStyle/>
           <a:p>
             <a:r>
-              <a:t>OLI STORY/SAY STATUS: PENDING CLOUD PASS — DO NOT TREAT THIS HOOK AS CANON SAY.</a:t>
+              <a:t>OLI CANON SAY — Cloud hard-review PASS.</a:t>
             </a:r>
           </a:p>
           <a:p/>
           <a:p>
             <a:r>
-              <a:t>PASTE APPROVED SAY HERE, preserving the instructional action below.</a:t>
-            </a:r>
-          </a:p>
-          <a:p/>
-          <a:p>
-            <a:r>
-              <a:t>TEACH HOOK — Define correlation coefficient and explicitly separate association from mechanism.</a:t>
+              <a:t>TEACH — Explain correlation coefficient as linear association. Keep correlation separate from causation.</a:t>
             </a:r>
           </a:p>
         </p:txBody>
@@ -1666,19 +1582,13 @@
           <a:lstStyle/>
           <a:p>
             <a:r>
-              <a:t>OLI STORY/SAY STATUS: PENDING CLOUD PASS — DO NOT TREAT THIS HOOK AS CANON SAY.</a:t>
+              <a:t>OLI CANON SAY — Cloud hard-review PASS.</a:t>
             </a:r>
           </a:p>
           <a:p/>
           <a:p>
             <a:r>
-              <a:t>PASTE APPROVED SAY HERE, preserving the instructional action below.</a:t>
-            </a:r>
-          </a:p>
-          <a:p/>
-          <a:p>
-            <a:r>
-              <a:t>TEACH HOOK — Connect slope units to an engineering interpretation.</a:t>
+              <a:t>TEACH — Demonstrate fitting a line in a spreadsheet. Connect the slope to its units.</a:t>
             </a:r>
           </a:p>
         </p:txBody>
@@ -1748,19 +1658,13 @@
           <a:lstStyle/>
           <a:p>
             <a:r>
-              <a:t>OLI STORY/SAY STATUS: PENDING CLOUD PASS — DO NOT TREAT THIS HOOK AS CANON SAY.</a:t>
+              <a:t>OLI CANON SAY — Cloud hard-review PASS.</a:t>
             </a:r>
           </a:p>
           <a:p/>
           <a:p>
             <a:r>
-              <a:t>PASTE APPROVED SAY HERE, preserving the instructional action below.</a:t>
-            </a:r>
-          </a:p>
-          <a:p/>
-          <a:p>
-            <a:r>
-              <a:t>TEACH HOOK — State that R² is fit in a sample, not a causation score.</a:t>
+              <a:t>TEACH — Explain R-squared as model fit. A high R-squared is not proof of cause.</a:t>
             </a:r>
           </a:p>
         </p:txBody>
@@ -1830,19 +1734,13 @@
           <a:lstStyle/>
           <a:p>
             <a:r>
-              <a:t>OLI STORY/SAY STATUS: PENDING CLOUD PASS — DO NOT TREAT THIS HOOK AS CANON SAY.</a:t>
+              <a:t>OLI CANON SAY — Cloud hard-review PASS.</a:t>
             </a:r>
           </a:p>
           <a:p/>
           <a:p>
             <a:r>
-              <a:t>PASTE APPROVED SAY HERE, preserving the instructional action below.</a:t>
-            </a:r>
-          </a:p>
-          <a:p/>
-          <a:p>
-            <a:r>
-              <a:t>TEACH HOOK — Invite an example of a fitted line that could still tell the wrong story.</a:t>
+              <a:t>TEACH — Keep the question open: a fitted pattern is not yet a mechanism.</a:t>
             </a:r>
           </a:p>
         </p:txBody>
@@ -5037,7 +4935,7 @@
                 </a:solidFill>
                 <a:latin typeface="Arial"/>
               </a:rPr>
-              <a:t>Correlation, regression, mechanism, and a temperature confound</a:t>
+              <a:t>Correlation, regression, mechanism, and a hidden driver</a:t>
             </a:r>
           </a:p>
         </p:txBody>
